--- a/FridayReportAI_Azure_Deployment_Flow.pptx
+++ b/FridayReportAI_Azure_Deployment_Flow.pptx
@@ -2893,6 +2893,331 @@
           </a:p>
         </p:txBody>
       </p:sp>
+      <p:sp>
+        <p:nvSpPr>
+          <p:cNvPr id="27" name="Shape 25"/>
+          <p:cNvSpPr/>
+          <p:nvPr/>
+        </p:nvSpPr>
+        <p:spPr>
+          <a:xfrm>
+            <a:off x="548640" y="4389120"/>
+            <a:ext cx="5029200" cy="1225296"/>
+          </a:xfrm>
+          <a:prstGeom prst="rect">
+            <a:avLst>
+              <a:gd name="adj" fmla="val 4478"/>
+            </a:avLst>
+          </a:prstGeom>
+          <a:solidFill>
+            <a:srgbClr val="FAF5FF"/>
+          </a:solidFill>
+          <a:ln w="25400">
+            <a:solidFill>
+              <a:srgbClr val="9333EA"/>
+            </a:solidFill>
+            <a:prstDash val="solid"/>
+          </a:ln>
+        </p:spPr>
+      </p:sp>
+      <p:sp>
+        <p:nvSpPr>
+          <p:cNvPr id="28" name="Shape 26"/>
+          <p:cNvSpPr/>
+          <p:nvPr/>
+        </p:nvSpPr>
+        <p:spPr>
+          <a:xfrm>
+            <a:off x="548640" y="4389120"/>
+            <a:ext cx="5029200" cy="54864"/>
+          </a:xfrm>
+          <a:prstGeom prst="rect">
+            <a:avLst/>
+          </a:prstGeom>
+          <a:solidFill>
+            <a:srgbClr val="9333EA"/>
+          </a:solidFill>
+          <a:ln/>
+        </p:spPr>
+      </p:sp>
+      <p:sp>
+        <p:nvSpPr>
+          <p:cNvPr id="29" name="Text 27"/>
+          <p:cNvSpPr/>
+          <p:nvPr/>
+        </p:nvSpPr>
+        <p:spPr>
+          <a:xfrm>
+            <a:off x="658368" y="4462272"/>
+            <a:ext cx="4809744" cy="1078992"/>
+          </a:xfrm>
+          <a:prstGeom prst="rect">
+            <a:avLst/>
+          </a:prstGeom>
+          <a:noFill/>
+          <a:ln/>
+        </p:spPr>
+        <p:txBody>
+          <a:bodyPr wrap="square" rtlCol="0" anchor="t"/>
+          <a:lstStyle/>
+          <a:p>
+            <a:pPr indent="0" marL="0">
+              <a:buNone/>
+            </a:pPr>
+            <a:r>
+              <a:rPr lang="en-US" sz="900" b="1" dirty="0">
+                <a:solidFill>
+                  <a:srgbClr val="9333EA"/>
+                </a:solidFill>
+                <a:latin typeface="Segoe UI" pitchFamily="34" charset="0"/>
+                <a:ea typeface="Segoe UI" pitchFamily="34" charset="-122"/>
+                <a:cs typeface="Segoe UI" pitchFamily="34" charset="-120"/>
+              </a:rPr>
+              <a:t>🔒 PERMISSIONS REQUIRED</a:t>
+            </a:r>
+            <a:endParaRPr lang="en-US" sz="900" dirty="0"/>
+          </a:p>
+          <a:p>
+            <a:pPr indent="0" marL="0">
+              <a:buNone/>
+            </a:pPr>
+            <a:r>
+              <a:rPr lang="en-US" sz="900" b="1" dirty="0">
+                <a:solidFill>
+                  <a:srgbClr val="17255A"/>
+                </a:solidFill>
+                <a:latin typeface="Segoe UI" pitchFamily="34" charset="0"/>
+                <a:ea typeface="Segoe UI" pitchFamily="34" charset="-122"/>
+                <a:cs typeface="Segoe UI" pitchFamily="34" charset="-120"/>
+              </a:rPr>
+              <a:t>Role: Developer / CI Pipeline</a:t>
+            </a:r>
+            <a:endParaRPr lang="en-US" sz="900" dirty="0"/>
+          </a:p>
+          <a:p>
+            <a:pPr indent="0" marL="0">
+              <a:buNone/>
+            </a:pPr>
+            <a:r>
+              <a:rPr lang="en-US" sz="900" dirty="0">
+                <a:solidFill>
+                  <a:srgbClr val="17255A"/>
+                </a:solidFill>
+                <a:latin typeface="Segoe UI" pitchFamily="34" charset="0"/>
+                <a:ea typeface="Segoe UI" pitchFamily="34" charset="-122"/>
+                <a:cs typeface="Segoe UI" pitchFamily="34" charset="-120"/>
+              </a:rPr>
+              <a:t>• Read access to source code repository</a:t>
+            </a:r>
+            <a:endParaRPr lang="en-US" sz="900" dirty="0"/>
+          </a:p>
+          <a:p>
+            <a:pPr indent="0" marL="0">
+              <a:buNone/>
+            </a:pPr>
+            <a:r>
+              <a:rPr lang="en-US" sz="900" dirty="0">
+                <a:solidFill>
+                  <a:srgbClr val="17255A"/>
+                </a:solidFill>
+                <a:latin typeface="Segoe UI" pitchFamily="34" charset="0"/>
+                <a:ea typeface="Segoe UI" pitchFamily="34" charset="-122"/>
+                <a:cs typeface="Segoe UI" pitchFamily="34" charset="-120"/>
+              </a:rPr>
+              <a:t>• Docker daemon access (local or CI runner)</a:t>
+            </a:r>
+            <a:endParaRPr lang="en-US" sz="900" dirty="0"/>
+          </a:p>
+          <a:p>
+            <a:pPr indent="0" marL="0">
+              <a:buNone/>
+            </a:pPr>
+            <a:r>
+              <a:rPr lang="en-US" sz="900" dirty="0">
+                <a:solidFill>
+                  <a:srgbClr val="17255A"/>
+                </a:solidFill>
+                <a:latin typeface="Segoe UI" pitchFamily="34" charset="0"/>
+                <a:ea typeface="Segoe UI" pitchFamily="34" charset="-122"/>
+                <a:cs typeface="Segoe UI" pitchFamily="34" charset="-120"/>
+              </a:rPr>
+              <a:t>• npm registry access for package installation</a:t>
+            </a:r>
+            <a:endParaRPr lang="en-US" sz="900" dirty="0"/>
+          </a:p>
+          <a:p>
+            <a:pPr indent="0" marL="0">
+              <a:buNone/>
+            </a:pPr>
+            <a:r>
+              <a:rPr lang="en-US" sz="900" dirty="0">
+                <a:solidFill>
+                  <a:srgbClr val="17255A"/>
+                </a:solidFill>
+                <a:latin typeface="Segoe UI" pitchFamily="34" charset="0"/>
+                <a:ea typeface="Segoe UI" pitchFamily="34" charset="-122"/>
+                <a:cs typeface="Segoe UI" pitchFamily="34" charset="-120"/>
+              </a:rPr>
+              <a:t>• No Azure permissions needed at this stage</a:t>
+            </a:r>
+            <a:endParaRPr lang="en-US" sz="900" dirty="0"/>
+          </a:p>
+        </p:txBody>
+      </p:sp>
+      <p:sp>
+        <p:nvSpPr>
+          <p:cNvPr id="30" name="Shape 28"/>
+          <p:cNvSpPr/>
+          <p:nvPr/>
+        </p:nvSpPr>
+        <p:spPr>
+          <a:xfrm>
+            <a:off x="5943600" y="4389120"/>
+            <a:ext cx="5669280" cy="1024128"/>
+          </a:xfrm>
+          <a:prstGeom prst="rect">
+            <a:avLst>
+              <a:gd name="adj" fmla="val 5357"/>
+            </a:avLst>
+          </a:prstGeom>
+          <a:solidFill>
+            <a:srgbClr val="FAF5FF"/>
+          </a:solidFill>
+          <a:ln w="25400">
+            <a:solidFill>
+              <a:srgbClr val="9333EA"/>
+            </a:solidFill>
+            <a:prstDash val="solid"/>
+          </a:ln>
+        </p:spPr>
+      </p:sp>
+      <p:sp>
+        <p:nvSpPr>
+          <p:cNvPr id="31" name="Shape 29"/>
+          <p:cNvSpPr/>
+          <p:nvPr/>
+        </p:nvSpPr>
+        <p:spPr>
+          <a:xfrm>
+            <a:off x="5943600" y="4389120"/>
+            <a:ext cx="5669280" cy="54864"/>
+          </a:xfrm>
+          <a:prstGeom prst="rect">
+            <a:avLst/>
+          </a:prstGeom>
+          <a:solidFill>
+            <a:srgbClr val="9333EA"/>
+          </a:solidFill>
+          <a:ln/>
+        </p:spPr>
+      </p:sp>
+      <p:sp>
+        <p:nvSpPr>
+          <p:cNvPr id="32" name="Text 30"/>
+          <p:cNvSpPr/>
+          <p:nvPr/>
+        </p:nvSpPr>
+        <p:spPr>
+          <a:xfrm>
+            <a:off x="6053328" y="4462272"/>
+            <a:ext cx="5449824" cy="877824"/>
+          </a:xfrm>
+          <a:prstGeom prst="rect">
+            <a:avLst/>
+          </a:prstGeom>
+          <a:noFill/>
+          <a:ln/>
+        </p:spPr>
+        <p:txBody>
+          <a:bodyPr wrap="square" rtlCol="0" anchor="t"/>
+          <a:lstStyle/>
+          <a:p>
+            <a:pPr indent="0" marL="0">
+              <a:buNone/>
+            </a:pPr>
+            <a:r>
+              <a:rPr lang="en-US" sz="900" b="1" dirty="0">
+                <a:solidFill>
+                  <a:srgbClr val="9333EA"/>
+                </a:solidFill>
+                <a:latin typeface="Segoe UI" pitchFamily="34" charset="0"/>
+                <a:ea typeface="Segoe UI" pitchFamily="34" charset="-122"/>
+                <a:cs typeface="Segoe UI" pitchFamily="34" charset="-120"/>
+              </a:rPr>
+              <a:t>🔒 PERMISSIONS REQUIRED</a:t>
+            </a:r>
+            <a:endParaRPr lang="en-US" sz="900" dirty="0"/>
+          </a:p>
+          <a:p>
+            <a:pPr indent="0" marL="0">
+              <a:buNone/>
+            </a:pPr>
+            <a:r>
+              <a:rPr lang="en-US" sz="900" b="1" dirty="0">
+                <a:solidFill>
+                  <a:srgbClr val="17255A"/>
+                </a:solidFill>
+                <a:latin typeface="Segoe UI" pitchFamily="34" charset="0"/>
+                <a:ea typeface="Segoe UI" pitchFamily="34" charset="-122"/>
+                <a:cs typeface="Segoe UI" pitchFamily="34" charset="-120"/>
+              </a:rPr>
+              <a:t>Role: CI/CD Service Principal (if automated)</a:t>
+            </a:r>
+            <a:endParaRPr lang="en-US" sz="900" dirty="0"/>
+          </a:p>
+          <a:p>
+            <a:pPr indent="0" marL="0">
+              <a:buNone/>
+            </a:pPr>
+            <a:r>
+              <a:rPr lang="en-US" sz="900" dirty="0">
+                <a:solidFill>
+                  <a:srgbClr val="17255A"/>
+                </a:solidFill>
+                <a:latin typeface="Segoe UI" pitchFamily="34" charset="0"/>
+                <a:ea typeface="Segoe UI" pitchFamily="34" charset="-122"/>
+                <a:cs typeface="Segoe UI" pitchFamily="34" charset="-120"/>
+              </a:rPr>
+              <a:t>• Azure DevOps: Build Agent access</a:t>
+            </a:r>
+            <a:endParaRPr lang="en-US" sz="900" dirty="0"/>
+          </a:p>
+          <a:p>
+            <a:pPr indent="0" marL="0">
+              <a:buNone/>
+            </a:pPr>
+            <a:r>
+              <a:rPr lang="en-US" sz="900" dirty="0">
+                <a:solidFill>
+                  <a:srgbClr val="17255A"/>
+                </a:solidFill>
+                <a:latin typeface="Segoe UI" pitchFamily="34" charset="0"/>
+                <a:ea typeface="Segoe UI" pitchFamily="34" charset="-122"/>
+                <a:cs typeface="Segoe UI" pitchFamily="34" charset="-120"/>
+              </a:rPr>
+              <a:t>• GitHub Actions: GITHUB_TOKEN (for checkout)</a:t>
+            </a:r>
+            <a:endParaRPr lang="en-US" sz="900" dirty="0"/>
+          </a:p>
+          <a:p>
+            <a:pPr indent="0" marL="0">
+              <a:buNone/>
+            </a:pPr>
+            <a:r>
+              <a:rPr lang="en-US" sz="900" dirty="0">
+                <a:solidFill>
+                  <a:srgbClr val="17255A"/>
+                </a:solidFill>
+                <a:latin typeface="Segoe UI" pitchFamily="34" charset="0"/>
+                <a:ea typeface="Segoe UI" pitchFamily="34" charset="-122"/>
+                <a:cs typeface="Segoe UI" pitchFamily="34" charset="-120"/>
+              </a:rPr>
+              <a:t>• Docker socket or Docker-in-Docker capability</a:t>
+            </a:r>
+            <a:endParaRPr lang="en-US" sz="900" dirty="0"/>
+          </a:p>
+        </p:txBody>
+      </p:sp>
     </p:spTree>
   </p:cSld>
   <p:clrMapOvr>
@@ -3889,6 +4214,331 @@
           </a:p>
         </p:txBody>
       </p:sp>
+      <p:sp>
+        <p:nvSpPr>
+          <p:cNvPr id="25" name="Shape 23"/>
+          <p:cNvSpPr/>
+          <p:nvPr/>
+        </p:nvSpPr>
+        <p:spPr>
+          <a:xfrm>
+            <a:off x="548640" y="4572000"/>
+            <a:ext cx="5029200" cy="1225296"/>
+          </a:xfrm>
+          <a:prstGeom prst="rect">
+            <a:avLst>
+              <a:gd name="adj" fmla="val 4478"/>
+            </a:avLst>
+          </a:prstGeom>
+          <a:solidFill>
+            <a:srgbClr val="FAF5FF"/>
+          </a:solidFill>
+          <a:ln w="25400">
+            <a:solidFill>
+              <a:srgbClr val="9333EA"/>
+            </a:solidFill>
+            <a:prstDash val="solid"/>
+          </a:ln>
+        </p:spPr>
+      </p:sp>
+      <p:sp>
+        <p:nvSpPr>
+          <p:cNvPr id="26" name="Shape 24"/>
+          <p:cNvSpPr/>
+          <p:nvPr/>
+        </p:nvSpPr>
+        <p:spPr>
+          <a:xfrm>
+            <a:off x="548640" y="4572000"/>
+            <a:ext cx="5029200" cy="54864"/>
+          </a:xfrm>
+          <a:prstGeom prst="rect">
+            <a:avLst/>
+          </a:prstGeom>
+          <a:solidFill>
+            <a:srgbClr val="9333EA"/>
+          </a:solidFill>
+          <a:ln/>
+        </p:spPr>
+      </p:sp>
+      <p:sp>
+        <p:nvSpPr>
+          <p:cNvPr id="27" name="Text 25"/>
+          <p:cNvSpPr/>
+          <p:nvPr/>
+        </p:nvSpPr>
+        <p:spPr>
+          <a:xfrm>
+            <a:off x="658368" y="4645152"/>
+            <a:ext cx="4809744" cy="1078992"/>
+          </a:xfrm>
+          <a:prstGeom prst="rect">
+            <a:avLst/>
+          </a:prstGeom>
+          <a:noFill/>
+          <a:ln/>
+        </p:spPr>
+        <p:txBody>
+          <a:bodyPr wrap="square" rtlCol="0" anchor="t"/>
+          <a:lstStyle/>
+          <a:p>
+            <a:pPr indent="0" marL="0">
+              <a:buNone/>
+            </a:pPr>
+            <a:r>
+              <a:rPr lang="en-US" sz="900" b="1" dirty="0">
+                <a:solidFill>
+                  <a:srgbClr val="9333EA"/>
+                </a:solidFill>
+                <a:latin typeface="Segoe UI" pitchFamily="34" charset="0"/>
+                <a:ea typeface="Segoe UI" pitchFamily="34" charset="-122"/>
+                <a:cs typeface="Segoe UI" pitchFamily="34" charset="-120"/>
+              </a:rPr>
+              <a:t>🔒 PERMISSIONS REQUIRED</a:t>
+            </a:r>
+            <a:endParaRPr lang="en-US" sz="900" dirty="0"/>
+          </a:p>
+          <a:p>
+            <a:pPr indent="0" marL="0">
+              <a:buNone/>
+            </a:pPr>
+            <a:r>
+              <a:rPr lang="en-US" sz="900" b="1" dirty="0">
+                <a:solidFill>
+                  <a:srgbClr val="17255A"/>
+                </a:solidFill>
+                <a:latin typeface="Segoe UI" pitchFamily="34" charset="0"/>
+                <a:ea typeface="Segoe UI" pitchFamily="34" charset="-122"/>
+                <a:cs typeface="Segoe UI" pitchFamily="34" charset="-120"/>
+              </a:rPr>
+              <a:t>Role: Deployer / CI Service Principal</a:t>
+            </a:r>
+            <a:endParaRPr lang="en-US" sz="900" dirty="0"/>
+          </a:p>
+          <a:p>
+            <a:pPr indent="0" marL="0">
+              <a:buNone/>
+            </a:pPr>
+            <a:r>
+              <a:rPr lang="en-US" sz="900" dirty="0">
+                <a:solidFill>
+                  <a:srgbClr val="17255A"/>
+                </a:solidFill>
+                <a:latin typeface="Segoe UI" pitchFamily="34" charset="0"/>
+                <a:ea typeface="Segoe UI" pitchFamily="34" charset="-122"/>
+                <a:cs typeface="Segoe UI" pitchFamily="34" charset="-120"/>
+              </a:rPr>
+              <a:t>• AcrPush — Push images to Container Registry</a:t>
+            </a:r>
+            <a:endParaRPr lang="en-US" sz="900" dirty="0"/>
+          </a:p>
+          <a:p>
+            <a:pPr indent="0" marL="0">
+              <a:buNone/>
+            </a:pPr>
+            <a:r>
+              <a:rPr lang="en-US" sz="900" dirty="0">
+                <a:solidFill>
+                  <a:srgbClr val="17255A"/>
+                </a:solidFill>
+                <a:latin typeface="Segoe UI" pitchFamily="34" charset="0"/>
+                <a:ea typeface="Segoe UI" pitchFamily="34" charset="-122"/>
+                <a:cs typeface="Segoe UI" pitchFamily="34" charset="-120"/>
+              </a:rPr>
+              <a:t>• AcrPull — Pull images (assigned to Container App identity)</a:t>
+            </a:r>
+            <a:endParaRPr lang="en-US" sz="900" dirty="0"/>
+          </a:p>
+          <a:p>
+            <a:pPr indent="0" marL="0">
+              <a:buNone/>
+            </a:pPr>
+            <a:r>
+              <a:rPr lang="en-US" sz="900" dirty="0">
+                <a:solidFill>
+                  <a:srgbClr val="17255A"/>
+                </a:solidFill>
+                <a:latin typeface="Segoe UI" pitchFamily="34" charset="0"/>
+                <a:ea typeface="Segoe UI" pitchFamily="34" charset="-122"/>
+                <a:cs typeface="Segoe UI" pitchFamily="34" charset="-120"/>
+              </a:rPr>
+              <a:t>• az acr login — Requires AAD authentication</a:t>
+            </a:r>
+            <a:endParaRPr lang="en-US" sz="900" dirty="0"/>
+          </a:p>
+          <a:p>
+            <a:pPr indent="0" marL="0">
+              <a:buNone/>
+            </a:pPr>
+            <a:r>
+              <a:rPr lang="en-US" sz="900" dirty="0">
+                <a:solidFill>
+                  <a:srgbClr val="17255A"/>
+                </a:solidFill>
+                <a:latin typeface="Segoe UI" pitchFamily="34" charset="0"/>
+                <a:ea typeface="Segoe UI" pitchFamily="34" charset="-122"/>
+                <a:cs typeface="Segoe UI" pitchFamily="34" charset="-120"/>
+              </a:rPr>
+              <a:t>• If using az acr build: AcrPush + Contributor on ACR</a:t>
+            </a:r>
+            <a:endParaRPr lang="en-US" sz="900" dirty="0"/>
+          </a:p>
+        </p:txBody>
+      </p:sp>
+      <p:sp>
+        <p:nvSpPr>
+          <p:cNvPr id="28" name="Shape 26"/>
+          <p:cNvSpPr/>
+          <p:nvPr/>
+        </p:nvSpPr>
+        <p:spPr>
+          <a:xfrm>
+            <a:off x="5943600" y="4572000"/>
+            <a:ext cx="5669280" cy="1024128"/>
+          </a:xfrm>
+          <a:prstGeom prst="rect">
+            <a:avLst>
+              <a:gd name="adj" fmla="val 5357"/>
+            </a:avLst>
+          </a:prstGeom>
+          <a:solidFill>
+            <a:srgbClr val="FAF5FF"/>
+          </a:solidFill>
+          <a:ln w="25400">
+            <a:solidFill>
+              <a:srgbClr val="9333EA"/>
+            </a:solidFill>
+            <a:prstDash val="solid"/>
+          </a:ln>
+        </p:spPr>
+      </p:sp>
+      <p:sp>
+        <p:nvSpPr>
+          <p:cNvPr id="29" name="Shape 27"/>
+          <p:cNvSpPr/>
+          <p:nvPr/>
+        </p:nvSpPr>
+        <p:spPr>
+          <a:xfrm>
+            <a:off x="5943600" y="4572000"/>
+            <a:ext cx="5669280" cy="54864"/>
+          </a:xfrm>
+          <a:prstGeom prst="rect">
+            <a:avLst/>
+          </a:prstGeom>
+          <a:solidFill>
+            <a:srgbClr val="9333EA"/>
+          </a:solidFill>
+          <a:ln/>
+        </p:spPr>
+      </p:sp>
+      <p:sp>
+        <p:nvSpPr>
+          <p:cNvPr id="30" name="Text 28"/>
+          <p:cNvSpPr/>
+          <p:nvPr/>
+        </p:nvSpPr>
+        <p:spPr>
+          <a:xfrm>
+            <a:off x="6053328" y="4645152"/>
+            <a:ext cx="5449824" cy="877824"/>
+          </a:xfrm>
+          <a:prstGeom prst="rect">
+            <a:avLst/>
+          </a:prstGeom>
+          <a:noFill/>
+          <a:ln/>
+        </p:spPr>
+        <p:txBody>
+          <a:bodyPr wrap="square" rtlCol="0" anchor="t"/>
+          <a:lstStyle/>
+          <a:p>
+            <a:pPr indent="0" marL="0">
+              <a:buNone/>
+            </a:pPr>
+            <a:r>
+              <a:rPr lang="en-US" sz="900" b="1" dirty="0">
+                <a:solidFill>
+                  <a:srgbClr val="9333EA"/>
+                </a:solidFill>
+                <a:latin typeface="Segoe UI" pitchFamily="34" charset="0"/>
+                <a:ea typeface="Segoe UI" pitchFamily="34" charset="-122"/>
+                <a:cs typeface="Segoe UI" pitchFamily="34" charset="-120"/>
+              </a:rPr>
+              <a:t>🔒 PERMISSIONS REQUIRED</a:t>
+            </a:r>
+            <a:endParaRPr lang="en-US" sz="900" dirty="0"/>
+          </a:p>
+          <a:p>
+            <a:pPr indent="0" marL="0">
+              <a:buNone/>
+            </a:pPr>
+            <a:r>
+              <a:rPr lang="en-US" sz="900" b="1" dirty="0">
+                <a:solidFill>
+                  <a:srgbClr val="17255A"/>
+                </a:solidFill>
+                <a:latin typeface="Segoe UI" pitchFamily="34" charset="0"/>
+                <a:ea typeface="Segoe UI" pitchFamily="34" charset="-122"/>
+                <a:cs typeface="Segoe UI" pitchFamily="34" charset="-120"/>
+              </a:rPr>
+              <a:t>Role: ACR Admin (initial setup only)</a:t>
+            </a:r>
+            <a:endParaRPr lang="en-US" sz="900" dirty="0"/>
+          </a:p>
+          <a:p>
+            <a:pPr indent="0" marL="0">
+              <a:buNone/>
+            </a:pPr>
+            <a:r>
+              <a:rPr lang="en-US" sz="900" dirty="0">
+                <a:solidFill>
+                  <a:srgbClr val="17255A"/>
+                </a:solidFill>
+                <a:latin typeface="Segoe UI" pitchFamily="34" charset="0"/>
+                <a:ea typeface="Segoe UI" pitchFamily="34" charset="-122"/>
+                <a:cs typeface="Segoe UI" pitchFamily="34" charset="-120"/>
+              </a:rPr>
+              <a:t>• Contributor on ACR resource (to create/configure)</a:t>
+            </a:r>
+            <a:endParaRPr lang="en-US" sz="900" dirty="0"/>
+          </a:p>
+          <a:p>
+            <a:pPr indent="0" marL="0">
+              <a:buNone/>
+            </a:pPr>
+            <a:r>
+              <a:rPr lang="en-US" sz="900" dirty="0">
+                <a:solidFill>
+                  <a:srgbClr val="17255A"/>
+                </a:solidFill>
+                <a:latin typeface="Segoe UI" pitchFamily="34" charset="0"/>
+                <a:ea typeface="Segoe UI" pitchFamily="34" charset="-122"/>
+                <a:cs typeface="Segoe UI" pitchFamily="34" charset="-120"/>
+              </a:rPr>
+              <a:t>• User Access Administrator (to assign AcrPush/AcrPull roles)</a:t>
+            </a:r>
+            <a:endParaRPr lang="en-US" sz="900" dirty="0"/>
+          </a:p>
+          <a:p>
+            <a:pPr indent="0" marL="0">
+              <a:buNone/>
+            </a:pPr>
+            <a:r>
+              <a:rPr lang="en-US" sz="900" dirty="0">
+                <a:solidFill>
+                  <a:srgbClr val="17255A"/>
+                </a:solidFill>
+                <a:latin typeface="Segoe UI" pitchFamily="34" charset="0"/>
+                <a:ea typeface="Segoe UI" pitchFamily="34" charset="-122"/>
+                <a:cs typeface="Segoe UI" pitchFamily="34" charset="-120"/>
+              </a:rPr>
+              <a:t>• Disable admin user — use RBAC-only access</a:t>
+            </a:r>
+            <a:endParaRPr lang="en-US" sz="900" dirty="0"/>
+          </a:p>
+        </p:txBody>
+      </p:sp>
     </p:spTree>
   </p:cSld>
   <p:clrMapOvr>
@@ -5063,6 +5713,399 @@
           </a:p>
         </p:txBody>
       </p:sp>
+      <p:sp>
+        <p:nvSpPr>
+          <p:cNvPr id="29" name="Shape 27"/>
+          <p:cNvSpPr/>
+          <p:nvPr/>
+        </p:nvSpPr>
+        <p:spPr>
+          <a:xfrm>
+            <a:off x="548640" y="4389120"/>
+            <a:ext cx="5029200" cy="1627632"/>
+          </a:xfrm>
+          <a:prstGeom prst="rect">
+            <a:avLst>
+              <a:gd name="adj" fmla="val 3371"/>
+            </a:avLst>
+          </a:prstGeom>
+          <a:solidFill>
+            <a:srgbClr val="FAF5FF"/>
+          </a:solidFill>
+          <a:ln w="25400">
+            <a:solidFill>
+              <a:srgbClr val="9333EA"/>
+            </a:solidFill>
+            <a:prstDash val="solid"/>
+          </a:ln>
+        </p:spPr>
+      </p:sp>
+      <p:sp>
+        <p:nvSpPr>
+          <p:cNvPr id="30" name="Shape 28"/>
+          <p:cNvSpPr/>
+          <p:nvPr/>
+        </p:nvSpPr>
+        <p:spPr>
+          <a:xfrm>
+            <a:off x="548640" y="4389120"/>
+            <a:ext cx="5029200" cy="54864"/>
+          </a:xfrm>
+          <a:prstGeom prst="rect">
+            <a:avLst/>
+          </a:prstGeom>
+          <a:solidFill>
+            <a:srgbClr val="9333EA"/>
+          </a:solidFill>
+          <a:ln/>
+        </p:spPr>
+      </p:sp>
+      <p:sp>
+        <p:nvSpPr>
+          <p:cNvPr id="31" name="Text 29"/>
+          <p:cNvSpPr/>
+          <p:nvPr/>
+        </p:nvSpPr>
+        <p:spPr>
+          <a:xfrm>
+            <a:off x="658368" y="4462272"/>
+            <a:ext cx="4809744" cy="1481328"/>
+          </a:xfrm>
+          <a:prstGeom prst="rect">
+            <a:avLst/>
+          </a:prstGeom>
+          <a:noFill/>
+          <a:ln/>
+        </p:spPr>
+        <p:txBody>
+          <a:bodyPr wrap="square" rtlCol="0" anchor="t"/>
+          <a:lstStyle/>
+          <a:p>
+            <a:pPr indent="0" marL="0">
+              <a:buNone/>
+            </a:pPr>
+            <a:r>
+              <a:rPr lang="en-US" sz="900" b="1" dirty="0">
+                <a:solidFill>
+                  <a:srgbClr val="9333EA"/>
+                </a:solidFill>
+                <a:latin typeface="Segoe UI" pitchFamily="34" charset="0"/>
+                <a:ea typeface="Segoe UI" pitchFamily="34" charset="-122"/>
+                <a:cs typeface="Segoe UI" pitchFamily="34" charset="-120"/>
+              </a:rPr>
+              <a:t>🔒 PERMISSIONS REQUIRED</a:t>
+            </a:r>
+            <a:endParaRPr lang="en-US" sz="900" dirty="0"/>
+          </a:p>
+          <a:p>
+            <a:pPr indent="0" marL="0">
+              <a:buNone/>
+            </a:pPr>
+            <a:r>
+              <a:rPr lang="en-US" sz="900" b="1" dirty="0">
+                <a:solidFill>
+                  <a:srgbClr val="17255A"/>
+                </a:solidFill>
+                <a:latin typeface="Segoe UI" pitchFamily="34" charset="0"/>
+                <a:ea typeface="Segoe UI" pitchFamily="34" charset="-122"/>
+                <a:cs typeface="Segoe UI" pitchFamily="34" charset="-120"/>
+              </a:rPr>
+              <a:t>Role: Infrastructure Admin / Terraform SP</a:t>
+            </a:r>
+            <a:endParaRPr lang="en-US" sz="900" dirty="0"/>
+          </a:p>
+          <a:p>
+            <a:pPr indent="0" marL="0">
+              <a:buNone/>
+            </a:pPr>
+            <a:r>
+              <a:rPr lang="en-US" sz="900" dirty="0">
+                <a:solidFill>
+                  <a:srgbClr val="17255A"/>
+                </a:solidFill>
+                <a:latin typeface="Segoe UI" pitchFamily="34" charset="0"/>
+                <a:ea typeface="Segoe UI" pitchFamily="34" charset="-122"/>
+                <a:cs typeface="Segoe UI" pitchFamily="34" charset="-120"/>
+              </a:rPr>
+              <a:t>• Contributor on Resource Group (create all resources)</a:t>
+            </a:r>
+            <a:endParaRPr lang="en-US" sz="900" dirty="0"/>
+          </a:p>
+          <a:p>
+            <a:pPr indent="0" marL="0">
+              <a:buNone/>
+            </a:pPr>
+            <a:r>
+              <a:rPr lang="en-US" sz="900" dirty="0">
+                <a:solidFill>
+                  <a:srgbClr val="17255A"/>
+                </a:solidFill>
+                <a:latin typeface="Segoe UI" pitchFamily="34" charset="0"/>
+                <a:ea typeface="Segoe UI" pitchFamily="34" charset="-122"/>
+                <a:cs typeface="Segoe UI" pitchFamily="34" charset="-120"/>
+              </a:rPr>
+              <a:t>• Microsoft.DBforPostgreSQL/* — Create PostgreSQL server</a:t>
+            </a:r>
+            <a:endParaRPr lang="en-US" sz="900" dirty="0"/>
+          </a:p>
+          <a:p>
+            <a:pPr indent="0" marL="0">
+              <a:buNone/>
+            </a:pPr>
+            <a:r>
+              <a:rPr lang="en-US" sz="900" dirty="0">
+                <a:solidFill>
+                  <a:srgbClr val="17255A"/>
+                </a:solidFill>
+                <a:latin typeface="Segoe UI" pitchFamily="34" charset="0"/>
+                <a:ea typeface="Segoe UI" pitchFamily="34" charset="-122"/>
+                <a:cs typeface="Segoe UI" pitchFamily="34" charset="-120"/>
+              </a:rPr>
+              <a:t>• Microsoft.Storage/* — Create Storage Account</a:t>
+            </a:r>
+            <a:endParaRPr lang="en-US" sz="900" dirty="0"/>
+          </a:p>
+          <a:p>
+            <a:pPr indent="0" marL="0">
+              <a:buNone/>
+            </a:pPr>
+            <a:r>
+              <a:rPr lang="en-US" sz="900" dirty="0">
+                <a:solidFill>
+                  <a:srgbClr val="17255A"/>
+                </a:solidFill>
+                <a:latin typeface="Segoe UI" pitchFamily="34" charset="0"/>
+                <a:ea typeface="Segoe UI" pitchFamily="34" charset="-122"/>
+                <a:cs typeface="Segoe UI" pitchFamily="34" charset="-120"/>
+              </a:rPr>
+              <a:t>• Microsoft.KeyVault/* — Create and configure Key Vault</a:t>
+            </a:r>
+            <a:endParaRPr lang="en-US" sz="900" dirty="0"/>
+          </a:p>
+          <a:p>
+            <a:pPr indent="0" marL="0">
+              <a:buNone/>
+            </a:pPr>
+            <a:r>
+              <a:rPr lang="en-US" sz="900" dirty="0">
+                <a:solidFill>
+                  <a:srgbClr val="17255A"/>
+                </a:solidFill>
+                <a:latin typeface="Segoe UI" pitchFamily="34" charset="0"/>
+                <a:ea typeface="Segoe UI" pitchFamily="34" charset="-122"/>
+                <a:cs typeface="Segoe UI" pitchFamily="34" charset="-120"/>
+              </a:rPr>
+              <a:t>• Microsoft.OperationalInsights/* — Create Log Analytics</a:t>
+            </a:r>
+            <a:endParaRPr lang="en-US" sz="900" dirty="0"/>
+          </a:p>
+          <a:p>
+            <a:pPr indent="0" marL="0">
+              <a:buNone/>
+            </a:pPr>
+            <a:r>
+              <a:rPr lang="en-US" sz="900" dirty="0">
+                <a:solidFill>
+                  <a:srgbClr val="17255A"/>
+                </a:solidFill>
+                <a:latin typeface="Segoe UI" pitchFamily="34" charset="0"/>
+                <a:ea typeface="Segoe UI" pitchFamily="34" charset="-122"/>
+                <a:cs typeface="Segoe UI" pitchFamily="34" charset="-120"/>
+              </a:rPr>
+              <a:t>• Microsoft.App/* — Create Container App Environment</a:t>
+            </a:r>
+            <a:endParaRPr lang="en-US" sz="900" dirty="0"/>
+          </a:p>
+        </p:txBody>
+      </p:sp>
+      <p:sp>
+        <p:nvSpPr>
+          <p:cNvPr id="32" name="Shape 30"/>
+          <p:cNvSpPr/>
+          <p:nvPr/>
+        </p:nvSpPr>
+        <p:spPr>
+          <a:xfrm>
+            <a:off x="5943600" y="4389120"/>
+            <a:ext cx="5669280" cy="1426464"/>
+          </a:xfrm>
+          <a:prstGeom prst="rect">
+            <a:avLst>
+              <a:gd name="adj" fmla="val 3846"/>
+            </a:avLst>
+          </a:prstGeom>
+          <a:solidFill>
+            <a:srgbClr val="FAF5FF"/>
+          </a:solidFill>
+          <a:ln w="25400">
+            <a:solidFill>
+              <a:srgbClr val="9333EA"/>
+            </a:solidFill>
+            <a:prstDash val="solid"/>
+          </a:ln>
+        </p:spPr>
+      </p:sp>
+      <p:sp>
+        <p:nvSpPr>
+          <p:cNvPr id="33" name="Shape 31"/>
+          <p:cNvSpPr/>
+          <p:nvPr/>
+        </p:nvSpPr>
+        <p:spPr>
+          <a:xfrm>
+            <a:off x="5943600" y="4389120"/>
+            <a:ext cx="5669280" cy="54864"/>
+          </a:xfrm>
+          <a:prstGeom prst="rect">
+            <a:avLst/>
+          </a:prstGeom>
+          <a:solidFill>
+            <a:srgbClr val="9333EA"/>
+          </a:solidFill>
+          <a:ln/>
+        </p:spPr>
+      </p:sp>
+      <p:sp>
+        <p:nvSpPr>
+          <p:cNvPr id="34" name="Text 32"/>
+          <p:cNvSpPr/>
+          <p:nvPr/>
+        </p:nvSpPr>
+        <p:spPr>
+          <a:xfrm>
+            <a:off x="6053328" y="4462272"/>
+            <a:ext cx="5449824" cy="1280160"/>
+          </a:xfrm>
+          <a:prstGeom prst="rect">
+            <a:avLst/>
+          </a:prstGeom>
+          <a:noFill/>
+          <a:ln/>
+        </p:spPr>
+        <p:txBody>
+          <a:bodyPr wrap="square" rtlCol="0" anchor="t"/>
+          <a:lstStyle/>
+          <a:p>
+            <a:pPr indent="0" marL="0">
+              <a:buNone/>
+            </a:pPr>
+            <a:r>
+              <a:rPr lang="en-US" sz="900" b="1" dirty="0">
+                <a:solidFill>
+                  <a:srgbClr val="9333EA"/>
+                </a:solidFill>
+                <a:latin typeface="Segoe UI" pitchFamily="34" charset="0"/>
+                <a:ea typeface="Segoe UI" pitchFamily="34" charset="-122"/>
+                <a:cs typeface="Segoe UI" pitchFamily="34" charset="-120"/>
+              </a:rPr>
+              <a:t>🔒 PERMISSIONS REQUIRED</a:t>
+            </a:r>
+            <a:endParaRPr lang="en-US" sz="900" dirty="0"/>
+          </a:p>
+          <a:p>
+            <a:pPr indent="0" marL="0">
+              <a:buNone/>
+            </a:pPr>
+            <a:r>
+              <a:rPr lang="en-US" sz="900" b="1" dirty="0">
+                <a:solidFill>
+                  <a:srgbClr val="17255A"/>
+                </a:solidFill>
+                <a:latin typeface="Segoe UI" pitchFamily="34" charset="0"/>
+                <a:ea typeface="Segoe UI" pitchFamily="34" charset="-122"/>
+                <a:cs typeface="Segoe UI" pitchFamily="34" charset="-120"/>
+              </a:rPr>
+              <a:t>Role: Key Vault Secrets Officer</a:t>
+            </a:r>
+            <a:endParaRPr lang="en-US" sz="900" dirty="0"/>
+          </a:p>
+          <a:p>
+            <a:pPr indent="0" marL="0">
+              <a:buNone/>
+            </a:pPr>
+            <a:r>
+              <a:rPr lang="en-US" sz="900" dirty="0">
+                <a:solidFill>
+                  <a:srgbClr val="17255A"/>
+                </a:solidFill>
+                <a:latin typeface="Segoe UI" pitchFamily="34" charset="0"/>
+                <a:ea typeface="Segoe UI" pitchFamily="34" charset="-122"/>
+                <a:cs typeface="Segoe UI" pitchFamily="34" charset="-120"/>
+              </a:rPr>
+              <a:t>• Key Vault Administrator or Secrets Officer</a:t>
+            </a:r>
+            <a:endParaRPr lang="en-US" sz="900" dirty="0"/>
+          </a:p>
+          <a:p>
+            <a:pPr indent="0" marL="0">
+              <a:buNone/>
+            </a:pPr>
+            <a:r>
+              <a:rPr lang="en-US" sz="900" dirty="0">
+                <a:solidFill>
+                  <a:srgbClr val="17255A"/>
+                </a:solidFill>
+                <a:latin typeface="Segoe UI" pitchFamily="34" charset="0"/>
+                <a:ea typeface="Segoe UI" pitchFamily="34" charset="-122"/>
+                <a:cs typeface="Segoe UI" pitchFamily="34" charset="-120"/>
+              </a:rPr>
+              <a:t>• Set secrets: DATABASE_URL, SESSION_SECRET</a:t>
+            </a:r>
+            <a:endParaRPr lang="en-US" sz="900" dirty="0"/>
+          </a:p>
+          <a:p>
+            <a:pPr indent="0" marL="0">
+              <a:buNone/>
+            </a:pPr>
+            <a:r>
+              <a:rPr lang="en-US" sz="900" dirty="0">
+                <a:solidFill>
+                  <a:srgbClr val="17255A"/>
+                </a:solidFill>
+                <a:latin typeface="Segoe UI" pitchFamily="34" charset="0"/>
+                <a:ea typeface="Segoe UI" pitchFamily="34" charset="-122"/>
+                <a:cs typeface="Segoe UI" pitchFamily="34" charset="-120"/>
+              </a:rPr>
+              <a:t>• Set secrets: GOOGLE/MICROSOFT OAuth credentials</a:t>
+            </a:r>
+            <a:endParaRPr lang="en-US" sz="900" dirty="0"/>
+          </a:p>
+          <a:p>
+            <a:pPr indent="0" marL="0">
+              <a:buNone/>
+            </a:pPr>
+            <a:r>
+              <a:rPr lang="en-US" sz="900" dirty="0">
+                <a:solidFill>
+                  <a:srgbClr val="17255A"/>
+                </a:solidFill>
+                <a:latin typeface="Segoe UI" pitchFamily="34" charset="0"/>
+                <a:ea typeface="Segoe UI" pitchFamily="34" charset="-122"/>
+                <a:cs typeface="Segoe UI" pitchFamily="34" charset="-120"/>
+              </a:rPr>
+              <a:t>• Set secrets: RESEND_API_KEY</a:t>
+            </a:r>
+            <a:endParaRPr lang="en-US" sz="900" dirty="0"/>
+          </a:p>
+          <a:p>
+            <a:pPr indent="0" marL="0">
+              <a:buNone/>
+            </a:pPr>
+            <a:r>
+              <a:rPr lang="en-US" sz="900" dirty="0">
+                <a:solidFill>
+                  <a:srgbClr val="17255A"/>
+                </a:solidFill>
+                <a:latin typeface="Segoe UI" pitchFamily="34" charset="0"/>
+                <a:ea typeface="Segoe UI" pitchFamily="34" charset="-122"/>
+                <a:cs typeface="Segoe UI" pitchFamily="34" charset="-120"/>
+              </a:rPr>
+              <a:t>• Uses Azure RBAC (not vault access policies)</a:t>
+            </a:r>
+            <a:endParaRPr lang="en-US" sz="900" dirty="0"/>
+          </a:p>
+        </p:txBody>
+      </p:sp>
     </p:spTree>
   </p:cSld>
   <p:clrMapOvr>
@@ -6049,6 +7092,502 @@
           </a:p>
         </p:txBody>
       </p:sp>
+      <p:sp>
+        <p:nvSpPr>
+          <p:cNvPr id="23" name="Shape 21"/>
+          <p:cNvSpPr/>
+          <p:nvPr/>
+        </p:nvSpPr>
+        <p:spPr>
+          <a:xfrm>
+            <a:off x="548640" y="4572000"/>
+            <a:ext cx="3474720" cy="1024128"/>
+          </a:xfrm>
+          <a:prstGeom prst="rect">
+            <a:avLst>
+              <a:gd name="adj" fmla="val 5357"/>
+            </a:avLst>
+          </a:prstGeom>
+          <a:solidFill>
+            <a:srgbClr val="FAF5FF"/>
+          </a:solidFill>
+          <a:ln w="25400">
+            <a:solidFill>
+              <a:srgbClr val="9333EA"/>
+            </a:solidFill>
+            <a:prstDash val="solid"/>
+          </a:ln>
+        </p:spPr>
+      </p:sp>
+      <p:sp>
+        <p:nvSpPr>
+          <p:cNvPr id="24" name="Shape 22"/>
+          <p:cNvSpPr/>
+          <p:nvPr/>
+        </p:nvSpPr>
+        <p:spPr>
+          <a:xfrm>
+            <a:off x="548640" y="4572000"/>
+            <a:ext cx="3474720" cy="54864"/>
+          </a:xfrm>
+          <a:prstGeom prst="rect">
+            <a:avLst/>
+          </a:prstGeom>
+          <a:solidFill>
+            <a:srgbClr val="9333EA"/>
+          </a:solidFill>
+          <a:ln/>
+        </p:spPr>
+      </p:sp>
+      <p:sp>
+        <p:nvSpPr>
+          <p:cNvPr id="25" name="Text 23"/>
+          <p:cNvSpPr/>
+          <p:nvPr/>
+        </p:nvSpPr>
+        <p:spPr>
+          <a:xfrm>
+            <a:off x="658368" y="4645152"/>
+            <a:ext cx="3255264" cy="877824"/>
+          </a:xfrm>
+          <a:prstGeom prst="rect">
+            <a:avLst/>
+          </a:prstGeom>
+          <a:noFill/>
+          <a:ln/>
+        </p:spPr>
+        <p:txBody>
+          <a:bodyPr wrap="square" rtlCol="0" anchor="t"/>
+          <a:lstStyle/>
+          <a:p>
+            <a:pPr indent="0" marL="0">
+              <a:buNone/>
+            </a:pPr>
+            <a:r>
+              <a:rPr lang="en-US" sz="900" b="1" dirty="0">
+                <a:solidFill>
+                  <a:srgbClr val="9333EA"/>
+                </a:solidFill>
+                <a:latin typeface="Segoe UI" pitchFamily="34" charset="0"/>
+                <a:ea typeface="Segoe UI" pitchFamily="34" charset="-122"/>
+                <a:cs typeface="Segoe UI" pitchFamily="34" charset="-120"/>
+              </a:rPr>
+              <a:t>🔒 PERMISSIONS REQUIRED</a:t>
+            </a:r>
+            <a:endParaRPr lang="en-US" sz="900" dirty="0"/>
+          </a:p>
+          <a:p>
+            <a:pPr indent="0" marL="0">
+              <a:buNone/>
+            </a:pPr>
+            <a:r>
+              <a:rPr lang="en-US" sz="900" b="1" dirty="0">
+                <a:solidFill>
+                  <a:srgbClr val="17255A"/>
+                </a:solidFill>
+                <a:latin typeface="Segoe UI" pitchFamily="34" charset="0"/>
+                <a:ea typeface="Segoe UI" pitchFamily="34" charset="-122"/>
+                <a:cs typeface="Segoe UI" pitchFamily="34" charset="-120"/>
+              </a:rPr>
+              <a:t>Role: Container App Deployer</a:t>
+            </a:r>
+            <a:endParaRPr lang="en-US" sz="900" dirty="0"/>
+          </a:p>
+          <a:p>
+            <a:pPr indent="0" marL="0">
+              <a:buNone/>
+            </a:pPr>
+            <a:r>
+              <a:rPr lang="en-US" sz="900" dirty="0">
+                <a:solidFill>
+                  <a:srgbClr val="17255A"/>
+                </a:solidFill>
+                <a:latin typeface="Segoe UI" pitchFamily="34" charset="0"/>
+                <a:ea typeface="Segoe UI" pitchFamily="34" charset="-122"/>
+                <a:cs typeface="Segoe UI" pitchFamily="34" charset="-120"/>
+              </a:rPr>
+              <a:t>• Contributor on Container App Environment</a:t>
+            </a:r>
+            <a:endParaRPr lang="en-US" sz="900" dirty="0"/>
+          </a:p>
+          <a:p>
+            <a:pPr indent="0" marL="0">
+              <a:buNone/>
+            </a:pPr>
+            <a:r>
+              <a:rPr lang="en-US" sz="900" dirty="0">
+                <a:solidFill>
+                  <a:srgbClr val="17255A"/>
+                </a:solidFill>
+                <a:latin typeface="Segoe UI" pitchFamily="34" charset="0"/>
+                <a:ea typeface="Segoe UI" pitchFamily="34" charset="-122"/>
+                <a:cs typeface="Segoe UI" pitchFamily="34" charset="-120"/>
+              </a:rPr>
+              <a:t>• Microsoft.App/containerApps/* — Create/update apps</a:t>
+            </a:r>
+            <a:endParaRPr lang="en-US" sz="900" dirty="0"/>
+          </a:p>
+          <a:p>
+            <a:pPr indent="0" marL="0">
+              <a:buNone/>
+            </a:pPr>
+            <a:r>
+              <a:rPr lang="en-US" sz="900" dirty="0">
+                <a:solidFill>
+                  <a:srgbClr val="17255A"/>
+                </a:solidFill>
+                <a:latin typeface="Segoe UI" pitchFamily="34" charset="0"/>
+                <a:ea typeface="Segoe UI" pitchFamily="34" charset="-122"/>
+                <a:cs typeface="Segoe UI" pitchFamily="34" charset="-120"/>
+              </a:rPr>
+              <a:t>• AcrPull on ACR (assigned to app's Managed Identity)</a:t>
+            </a:r>
+            <a:endParaRPr lang="en-US" sz="900" dirty="0"/>
+          </a:p>
+        </p:txBody>
+      </p:sp>
+      <p:sp>
+        <p:nvSpPr>
+          <p:cNvPr id="26" name="Shape 24"/>
+          <p:cNvSpPr/>
+          <p:nvPr/>
+        </p:nvSpPr>
+        <p:spPr>
+          <a:xfrm>
+            <a:off x="4389120" y="4572000"/>
+            <a:ext cx="3474720" cy="1225296"/>
+          </a:xfrm>
+          <a:prstGeom prst="rect">
+            <a:avLst>
+              <a:gd name="adj" fmla="val 4478"/>
+            </a:avLst>
+          </a:prstGeom>
+          <a:solidFill>
+            <a:srgbClr val="FAF5FF"/>
+          </a:solidFill>
+          <a:ln w="25400">
+            <a:solidFill>
+              <a:srgbClr val="9333EA"/>
+            </a:solidFill>
+            <a:prstDash val="solid"/>
+          </a:ln>
+        </p:spPr>
+      </p:sp>
+      <p:sp>
+        <p:nvSpPr>
+          <p:cNvPr id="27" name="Shape 25"/>
+          <p:cNvSpPr/>
+          <p:nvPr/>
+        </p:nvSpPr>
+        <p:spPr>
+          <a:xfrm>
+            <a:off x="4389120" y="4572000"/>
+            <a:ext cx="3474720" cy="54864"/>
+          </a:xfrm>
+          <a:prstGeom prst="rect">
+            <a:avLst/>
+          </a:prstGeom>
+          <a:solidFill>
+            <a:srgbClr val="9333EA"/>
+          </a:solidFill>
+          <a:ln/>
+        </p:spPr>
+      </p:sp>
+      <p:sp>
+        <p:nvSpPr>
+          <p:cNvPr id="28" name="Text 26"/>
+          <p:cNvSpPr/>
+          <p:nvPr/>
+        </p:nvSpPr>
+        <p:spPr>
+          <a:xfrm>
+            <a:off x="4498848" y="4645152"/>
+            <a:ext cx="3255264" cy="1078992"/>
+          </a:xfrm>
+          <a:prstGeom prst="rect">
+            <a:avLst/>
+          </a:prstGeom>
+          <a:noFill/>
+          <a:ln/>
+        </p:spPr>
+        <p:txBody>
+          <a:bodyPr wrap="square" rtlCol="0" anchor="t"/>
+          <a:lstStyle/>
+          <a:p>
+            <a:pPr indent="0" marL="0">
+              <a:buNone/>
+            </a:pPr>
+            <a:r>
+              <a:rPr lang="en-US" sz="900" b="1" dirty="0">
+                <a:solidFill>
+                  <a:srgbClr val="9333EA"/>
+                </a:solidFill>
+                <a:latin typeface="Segoe UI" pitchFamily="34" charset="0"/>
+                <a:ea typeface="Segoe UI" pitchFamily="34" charset="-122"/>
+                <a:cs typeface="Segoe UI" pitchFamily="34" charset="-120"/>
+              </a:rPr>
+              <a:t>🔒 PERMISSIONS REQUIRED</a:t>
+            </a:r>
+            <a:endParaRPr lang="en-US" sz="900" dirty="0"/>
+          </a:p>
+          <a:p>
+            <a:pPr indent="0" marL="0">
+              <a:buNone/>
+            </a:pPr>
+            <a:r>
+              <a:rPr lang="en-US" sz="900" b="1" dirty="0">
+                <a:solidFill>
+                  <a:srgbClr val="17255A"/>
+                </a:solidFill>
+                <a:latin typeface="Segoe UI" pitchFamily="34" charset="0"/>
+                <a:ea typeface="Segoe UI" pitchFamily="34" charset="-122"/>
+                <a:cs typeface="Segoe UI" pitchFamily="34" charset="-120"/>
+              </a:rPr>
+              <a:t>Role: Identity &amp; Role Admin</a:t>
+            </a:r>
+            <a:endParaRPr lang="en-US" sz="900" dirty="0"/>
+          </a:p>
+          <a:p>
+            <a:pPr indent="0" marL="0">
+              <a:buNone/>
+            </a:pPr>
+            <a:r>
+              <a:rPr lang="en-US" sz="900" dirty="0">
+                <a:solidFill>
+                  <a:srgbClr val="17255A"/>
+                </a:solidFill>
+                <a:latin typeface="Segoe UI" pitchFamily="34" charset="0"/>
+                <a:ea typeface="Segoe UI" pitchFamily="34" charset="-122"/>
+                <a:cs typeface="Segoe UI" pitchFamily="34" charset="-120"/>
+              </a:rPr>
+              <a:t>• User Access Administrator on Resource Group</a:t>
+            </a:r>
+            <a:endParaRPr lang="en-US" sz="900" dirty="0"/>
+          </a:p>
+          <a:p>
+            <a:pPr indent="0" marL="0">
+              <a:buNone/>
+            </a:pPr>
+            <a:r>
+              <a:rPr lang="en-US" sz="900" dirty="0">
+                <a:solidFill>
+                  <a:srgbClr val="17255A"/>
+                </a:solidFill>
+                <a:latin typeface="Segoe UI" pitchFamily="34" charset="0"/>
+                <a:ea typeface="Segoe UI" pitchFamily="34" charset="-122"/>
+                <a:cs typeface="Segoe UI" pitchFamily="34" charset="-120"/>
+              </a:rPr>
+              <a:t>• Assign AcrPull to Container App identity</a:t>
+            </a:r>
+            <a:endParaRPr lang="en-US" sz="900" dirty="0"/>
+          </a:p>
+          <a:p>
+            <a:pPr indent="0" marL="0">
+              <a:buNone/>
+            </a:pPr>
+            <a:r>
+              <a:rPr lang="en-US" sz="900" dirty="0">
+                <a:solidFill>
+                  <a:srgbClr val="17255A"/>
+                </a:solidFill>
+                <a:latin typeface="Segoe UI" pitchFamily="34" charset="0"/>
+                <a:ea typeface="Segoe UI" pitchFamily="34" charset="-122"/>
+                <a:cs typeface="Segoe UI" pitchFamily="34" charset="-120"/>
+              </a:rPr>
+              <a:t>• Assign Key Vault Secrets User to app identity</a:t>
+            </a:r>
+            <a:endParaRPr lang="en-US" sz="900" dirty="0"/>
+          </a:p>
+          <a:p>
+            <a:pPr indent="0" marL="0">
+              <a:buNone/>
+            </a:pPr>
+            <a:r>
+              <a:rPr lang="en-US" sz="900" dirty="0">
+                <a:solidFill>
+                  <a:srgbClr val="17255A"/>
+                </a:solidFill>
+                <a:latin typeface="Segoe UI" pitchFamily="34" charset="0"/>
+                <a:ea typeface="Segoe UI" pitchFamily="34" charset="-122"/>
+                <a:cs typeface="Segoe UI" pitchFamily="34" charset="-120"/>
+              </a:rPr>
+              <a:t>• Assign Storage Blob Data Contributor to app identity</a:t>
+            </a:r>
+            <a:endParaRPr lang="en-US" sz="900" dirty="0"/>
+          </a:p>
+        </p:txBody>
+      </p:sp>
+      <p:sp>
+        <p:nvSpPr>
+          <p:cNvPr id="29" name="Shape 27"/>
+          <p:cNvSpPr/>
+          <p:nvPr/>
+        </p:nvSpPr>
+        <p:spPr>
+          <a:xfrm>
+            <a:off x="8229600" y="4572000"/>
+            <a:ext cx="3474720" cy="1225296"/>
+          </a:xfrm>
+          <a:prstGeom prst="rect">
+            <a:avLst>
+              <a:gd name="adj" fmla="val 4478"/>
+            </a:avLst>
+          </a:prstGeom>
+          <a:solidFill>
+            <a:srgbClr val="FAF5FF"/>
+          </a:solidFill>
+          <a:ln w="25400">
+            <a:solidFill>
+              <a:srgbClr val="9333EA"/>
+            </a:solidFill>
+            <a:prstDash val="solid"/>
+          </a:ln>
+        </p:spPr>
+      </p:sp>
+      <p:sp>
+        <p:nvSpPr>
+          <p:cNvPr id="30" name="Shape 28"/>
+          <p:cNvSpPr/>
+          <p:nvPr/>
+        </p:nvSpPr>
+        <p:spPr>
+          <a:xfrm>
+            <a:off x="8229600" y="4572000"/>
+            <a:ext cx="3474720" cy="54864"/>
+          </a:xfrm>
+          <a:prstGeom prst="rect">
+            <a:avLst/>
+          </a:prstGeom>
+          <a:solidFill>
+            <a:srgbClr val="9333EA"/>
+          </a:solidFill>
+          <a:ln/>
+        </p:spPr>
+      </p:sp>
+      <p:sp>
+        <p:nvSpPr>
+          <p:cNvPr id="31" name="Text 29"/>
+          <p:cNvSpPr/>
+          <p:nvPr/>
+        </p:nvSpPr>
+        <p:spPr>
+          <a:xfrm>
+            <a:off x="8339328" y="4645152"/>
+            <a:ext cx="3255264" cy="1078992"/>
+          </a:xfrm>
+          <a:prstGeom prst="rect">
+            <a:avLst/>
+          </a:prstGeom>
+          <a:noFill/>
+          <a:ln/>
+        </p:spPr>
+        <p:txBody>
+          <a:bodyPr wrap="square" rtlCol="0" anchor="t"/>
+          <a:lstStyle/>
+          <a:p>
+            <a:pPr indent="0" marL="0">
+              <a:buNone/>
+            </a:pPr>
+            <a:r>
+              <a:rPr lang="en-US" sz="900" b="1" dirty="0">
+                <a:solidFill>
+                  <a:srgbClr val="9333EA"/>
+                </a:solidFill>
+                <a:latin typeface="Segoe UI" pitchFamily="34" charset="0"/>
+                <a:ea typeface="Segoe UI" pitchFamily="34" charset="-122"/>
+                <a:cs typeface="Segoe UI" pitchFamily="34" charset="-120"/>
+              </a:rPr>
+              <a:t>🔒 PERMISSIONS REQUIRED</a:t>
+            </a:r>
+            <a:endParaRPr lang="en-US" sz="900" dirty="0"/>
+          </a:p>
+          <a:p>
+            <a:pPr indent="0" marL="0">
+              <a:buNone/>
+            </a:pPr>
+            <a:r>
+              <a:rPr lang="en-US" sz="900" b="1" dirty="0">
+                <a:solidFill>
+                  <a:srgbClr val="17255A"/>
+                </a:solidFill>
+                <a:latin typeface="Segoe UI" pitchFamily="34" charset="0"/>
+                <a:ea typeface="Segoe UI" pitchFamily="34" charset="-122"/>
+                <a:cs typeface="Segoe UI" pitchFamily="34" charset="-120"/>
+              </a:rPr>
+              <a:t>Role: DNS Administrator</a:t>
+            </a:r>
+            <a:endParaRPr lang="en-US" sz="900" dirty="0"/>
+          </a:p>
+          <a:p>
+            <a:pPr indent="0" marL="0">
+              <a:buNone/>
+            </a:pPr>
+            <a:r>
+              <a:rPr lang="en-US" sz="900" dirty="0">
+                <a:solidFill>
+                  <a:srgbClr val="17255A"/>
+                </a:solidFill>
+                <a:latin typeface="Segoe UI" pitchFamily="34" charset="0"/>
+                <a:ea typeface="Segoe UI" pitchFamily="34" charset="-122"/>
+                <a:cs typeface="Segoe UI" pitchFamily="34" charset="-120"/>
+              </a:rPr>
+              <a:t>• DNS zone management (external registrar)</a:t>
+            </a:r>
+            <a:endParaRPr lang="en-US" sz="900" dirty="0"/>
+          </a:p>
+          <a:p>
+            <a:pPr indent="0" marL="0">
+              <a:buNone/>
+            </a:pPr>
+            <a:r>
+              <a:rPr lang="en-US" sz="900" dirty="0">
+                <a:solidFill>
+                  <a:srgbClr val="17255A"/>
+                </a:solidFill>
+                <a:latin typeface="Segoe UI" pitchFamily="34" charset="0"/>
+                <a:ea typeface="Segoe UI" pitchFamily="34" charset="-122"/>
+                <a:cs typeface="Segoe UI" pitchFamily="34" charset="-120"/>
+              </a:rPr>
+              <a:t>• Create CNAME and TXT records</a:t>
+            </a:r>
+            <a:endParaRPr lang="en-US" sz="900" dirty="0"/>
+          </a:p>
+          <a:p>
+            <a:pPr indent="0" marL="0">
+              <a:buNone/>
+            </a:pPr>
+            <a:r>
+              <a:rPr lang="en-US" sz="900" dirty="0">
+                <a:solidFill>
+                  <a:srgbClr val="17255A"/>
+                </a:solidFill>
+                <a:latin typeface="Segoe UI" pitchFamily="34" charset="0"/>
+                <a:ea typeface="Segoe UI" pitchFamily="34" charset="-122"/>
+                <a:cs typeface="Segoe UI" pitchFamily="34" charset="-120"/>
+              </a:rPr>
+              <a:t>• Google Cloud Console access (OAuth config)</a:t>
+            </a:r>
+            <a:endParaRPr lang="en-US" sz="900" dirty="0"/>
+          </a:p>
+          <a:p>
+            <a:pPr indent="0" marL="0">
+              <a:buNone/>
+            </a:pPr>
+            <a:r>
+              <a:rPr lang="en-US" sz="900" dirty="0">
+                <a:solidFill>
+                  <a:srgbClr val="17255A"/>
+                </a:solidFill>
+                <a:latin typeface="Segoe UI" pitchFamily="34" charset="0"/>
+                <a:ea typeface="Segoe UI" pitchFamily="34" charset="-122"/>
+                <a:cs typeface="Segoe UI" pitchFamily="34" charset="-120"/>
+              </a:rPr>
+              <a:t>• Azure Portal: App Registrations (Entra ID)</a:t>
+            </a:r>
+            <a:endParaRPr lang="en-US" sz="900" dirty="0"/>
+          </a:p>
+        </p:txBody>
+      </p:sp>
     </p:spTree>
   </p:cSld>
   <p:clrMapOvr>
@@ -7541,6 +9080,348 @@
               <a:t>• Alert on container restart count</a:t>
             </a:r>
             <a:endParaRPr lang="en-US" sz="1100" dirty="0"/>
+          </a:p>
+        </p:txBody>
+      </p:sp>
+      <p:sp>
+        <p:nvSpPr>
+          <p:cNvPr id="36" name="Shape 34"/>
+          <p:cNvSpPr/>
+          <p:nvPr/>
+        </p:nvSpPr>
+        <p:spPr>
+          <a:xfrm>
+            <a:off x="548640" y="5486400"/>
+            <a:ext cx="5486400" cy="1225296"/>
+          </a:xfrm>
+          <a:prstGeom prst="rect">
+            <a:avLst>
+              <a:gd name="adj" fmla="val 4478"/>
+            </a:avLst>
+          </a:prstGeom>
+          <a:solidFill>
+            <a:srgbClr val="FAF5FF"/>
+          </a:solidFill>
+          <a:ln w="25400">
+            <a:solidFill>
+              <a:srgbClr val="9333EA"/>
+            </a:solidFill>
+            <a:prstDash val="solid"/>
+          </a:ln>
+        </p:spPr>
+      </p:sp>
+      <p:sp>
+        <p:nvSpPr>
+          <p:cNvPr id="37" name="Shape 35"/>
+          <p:cNvSpPr/>
+          <p:nvPr/>
+        </p:nvSpPr>
+        <p:spPr>
+          <a:xfrm>
+            <a:off x="548640" y="5486400"/>
+            <a:ext cx="5486400" cy="54864"/>
+          </a:xfrm>
+          <a:prstGeom prst="rect">
+            <a:avLst/>
+          </a:prstGeom>
+          <a:solidFill>
+            <a:srgbClr val="9333EA"/>
+          </a:solidFill>
+          <a:ln/>
+        </p:spPr>
+      </p:sp>
+      <p:sp>
+        <p:nvSpPr>
+          <p:cNvPr id="38" name="Text 36"/>
+          <p:cNvSpPr/>
+          <p:nvPr/>
+        </p:nvSpPr>
+        <p:spPr>
+          <a:xfrm>
+            <a:off x="658368" y="5559552"/>
+            <a:ext cx="5266944" cy="1078992"/>
+          </a:xfrm>
+          <a:prstGeom prst="rect">
+            <a:avLst/>
+          </a:prstGeom>
+          <a:noFill/>
+          <a:ln/>
+        </p:spPr>
+        <p:txBody>
+          <a:bodyPr wrap="square" rtlCol="0" anchor="t"/>
+          <a:lstStyle/>
+          <a:p>
+            <a:pPr indent="0" marL="0">
+              <a:buNone/>
+            </a:pPr>
+            <a:r>
+              <a:rPr lang="en-US" sz="900" b="1" dirty="0">
+                <a:solidFill>
+                  <a:srgbClr val="9333EA"/>
+                </a:solidFill>
+                <a:latin typeface="Segoe UI" pitchFamily="34" charset="0"/>
+                <a:ea typeface="Segoe UI" pitchFamily="34" charset="-122"/>
+                <a:cs typeface="Segoe UI" pitchFamily="34" charset="-120"/>
+              </a:rPr>
+              <a:t>🔒 PERMISSIONS REQUIRED</a:t>
+            </a:r>
+            <a:endParaRPr lang="en-US" sz="900" dirty="0"/>
+          </a:p>
+          <a:p>
+            <a:pPr indent="0" marL="0">
+              <a:buNone/>
+            </a:pPr>
+            <a:r>
+              <a:rPr lang="en-US" sz="900" b="1" dirty="0">
+                <a:solidFill>
+                  <a:srgbClr val="17255A"/>
+                </a:solidFill>
+                <a:latin typeface="Segoe UI" pitchFamily="34" charset="0"/>
+                <a:ea typeface="Segoe UI" pitchFamily="34" charset="-122"/>
+                <a:cs typeface="Segoe UI" pitchFamily="34" charset="-120"/>
+              </a:rPr>
+              <a:t>Role: Container App Managed Identity (runtime)</a:t>
+            </a:r>
+            <a:endParaRPr lang="en-US" sz="900" dirty="0"/>
+          </a:p>
+          <a:p>
+            <a:pPr indent="0" marL="0">
+              <a:buNone/>
+            </a:pPr>
+            <a:r>
+              <a:rPr lang="en-US" sz="900" dirty="0">
+                <a:solidFill>
+                  <a:srgbClr val="17255A"/>
+                </a:solidFill>
+                <a:latin typeface="Segoe UI" pitchFamily="34" charset="0"/>
+                <a:ea typeface="Segoe UI" pitchFamily="34" charset="-122"/>
+                <a:cs typeface="Segoe UI" pitchFamily="34" charset="-120"/>
+              </a:rPr>
+              <a:t>• AcrPull — Pull container images on restart/scale-out</a:t>
+            </a:r>
+            <a:endParaRPr lang="en-US" sz="900" dirty="0"/>
+          </a:p>
+          <a:p>
+            <a:pPr indent="0" marL="0">
+              <a:buNone/>
+            </a:pPr>
+            <a:r>
+              <a:rPr lang="en-US" sz="900" dirty="0">
+                <a:solidFill>
+                  <a:srgbClr val="17255A"/>
+                </a:solidFill>
+                <a:latin typeface="Segoe UI" pitchFamily="34" charset="0"/>
+                <a:ea typeface="Segoe UI" pitchFamily="34" charset="-122"/>
+                <a:cs typeface="Segoe UI" pitchFamily="34" charset="-120"/>
+              </a:rPr>
+              <a:t>• Key Vault Secrets User — Read secrets at startup</a:t>
+            </a:r>
+            <a:endParaRPr lang="en-US" sz="900" dirty="0"/>
+          </a:p>
+          <a:p>
+            <a:pPr indent="0" marL="0">
+              <a:buNone/>
+            </a:pPr>
+            <a:r>
+              <a:rPr lang="en-US" sz="900" dirty="0">
+                <a:solidFill>
+                  <a:srgbClr val="17255A"/>
+                </a:solidFill>
+                <a:latin typeface="Segoe UI" pitchFamily="34" charset="0"/>
+                <a:ea typeface="Segoe UI" pitchFamily="34" charset="-122"/>
+                <a:cs typeface="Segoe UI" pitchFamily="34" charset="-120"/>
+              </a:rPr>
+              <a:t>• Storage Blob Data Contributor — Read/write file uploads</a:t>
+            </a:r>
+            <a:endParaRPr lang="en-US" sz="900" dirty="0"/>
+          </a:p>
+          <a:p>
+            <a:pPr indent="0" marL="0">
+              <a:buNone/>
+            </a:pPr>
+            <a:r>
+              <a:rPr lang="en-US" sz="900" dirty="0">
+                <a:solidFill>
+                  <a:srgbClr val="17255A"/>
+                </a:solidFill>
+                <a:latin typeface="Segoe UI" pitchFamily="34" charset="0"/>
+                <a:ea typeface="Segoe UI" pitchFamily="34" charset="-122"/>
+                <a:cs typeface="Segoe UI" pitchFamily="34" charset="-120"/>
+              </a:rPr>
+              <a:t>• PostgreSQL access via DATABASE_URL connection string (not RBAC)</a:t>
+            </a:r>
+            <a:endParaRPr lang="en-US" sz="900" dirty="0"/>
+          </a:p>
+        </p:txBody>
+      </p:sp>
+      <p:sp>
+        <p:nvSpPr>
+          <p:cNvPr id="39" name="Shape 37"/>
+          <p:cNvSpPr/>
+          <p:nvPr/>
+        </p:nvSpPr>
+        <p:spPr>
+          <a:xfrm>
+            <a:off x="6400800" y="5486400"/>
+            <a:ext cx="5212080" cy="1225296"/>
+          </a:xfrm>
+          <a:prstGeom prst="rect">
+            <a:avLst>
+              <a:gd name="adj" fmla="val 4478"/>
+            </a:avLst>
+          </a:prstGeom>
+          <a:solidFill>
+            <a:srgbClr val="FAF5FF"/>
+          </a:solidFill>
+          <a:ln w="25400">
+            <a:solidFill>
+              <a:srgbClr val="9333EA"/>
+            </a:solidFill>
+            <a:prstDash val="solid"/>
+          </a:ln>
+        </p:spPr>
+      </p:sp>
+      <p:sp>
+        <p:nvSpPr>
+          <p:cNvPr id="40" name="Shape 38"/>
+          <p:cNvSpPr/>
+          <p:nvPr/>
+        </p:nvSpPr>
+        <p:spPr>
+          <a:xfrm>
+            <a:off x="6400800" y="5486400"/>
+            <a:ext cx="5212080" cy="54864"/>
+          </a:xfrm>
+          <a:prstGeom prst="rect">
+            <a:avLst/>
+          </a:prstGeom>
+          <a:solidFill>
+            <a:srgbClr val="9333EA"/>
+          </a:solidFill>
+          <a:ln/>
+        </p:spPr>
+      </p:sp>
+      <p:sp>
+        <p:nvSpPr>
+          <p:cNvPr id="41" name="Text 39"/>
+          <p:cNvSpPr/>
+          <p:nvPr/>
+        </p:nvSpPr>
+        <p:spPr>
+          <a:xfrm>
+            <a:off x="6510528" y="5559552"/>
+            <a:ext cx="4992624" cy="1078992"/>
+          </a:xfrm>
+          <a:prstGeom prst="rect">
+            <a:avLst/>
+          </a:prstGeom>
+          <a:noFill/>
+          <a:ln/>
+        </p:spPr>
+        <p:txBody>
+          <a:bodyPr wrap="square" rtlCol="0" anchor="t"/>
+          <a:lstStyle/>
+          <a:p>
+            <a:pPr indent="0" marL="0">
+              <a:buNone/>
+            </a:pPr>
+            <a:r>
+              <a:rPr lang="en-US" sz="900" b="1" dirty="0">
+                <a:solidFill>
+                  <a:srgbClr val="9333EA"/>
+                </a:solidFill>
+                <a:latin typeface="Segoe UI" pitchFamily="34" charset="0"/>
+                <a:ea typeface="Segoe UI" pitchFamily="34" charset="-122"/>
+                <a:cs typeface="Segoe UI" pitchFamily="34" charset="-120"/>
+              </a:rPr>
+              <a:t>🔒 PERMISSIONS REQUIRED</a:t>
+            </a:r>
+            <a:endParaRPr lang="en-US" sz="900" dirty="0"/>
+          </a:p>
+          <a:p>
+            <a:pPr indent="0" marL="0">
+              <a:buNone/>
+            </a:pPr>
+            <a:r>
+              <a:rPr lang="en-US" sz="900" b="1" dirty="0">
+                <a:solidFill>
+                  <a:srgbClr val="17255A"/>
+                </a:solidFill>
+                <a:latin typeface="Segoe UI" pitchFamily="34" charset="0"/>
+                <a:ea typeface="Segoe UI" pitchFamily="34" charset="-122"/>
+                <a:cs typeface="Segoe UI" pitchFamily="34" charset="-120"/>
+              </a:rPr>
+              <a:t>Role: Operations / SRE Team</a:t>
+            </a:r>
+            <a:endParaRPr lang="en-US" sz="900" dirty="0"/>
+          </a:p>
+          <a:p>
+            <a:pPr indent="0" marL="0">
+              <a:buNone/>
+            </a:pPr>
+            <a:r>
+              <a:rPr lang="en-US" sz="900" dirty="0">
+                <a:solidFill>
+                  <a:srgbClr val="17255A"/>
+                </a:solidFill>
+                <a:latin typeface="Segoe UI" pitchFamily="34" charset="0"/>
+                <a:ea typeface="Segoe UI" pitchFamily="34" charset="-122"/>
+                <a:cs typeface="Segoe UI" pitchFamily="34" charset="-120"/>
+              </a:rPr>
+              <a:t>• Reader on Resource Group — View all resources</a:t>
+            </a:r>
+            <a:endParaRPr lang="en-US" sz="900" dirty="0"/>
+          </a:p>
+          <a:p>
+            <a:pPr indent="0" marL="0">
+              <a:buNone/>
+            </a:pPr>
+            <a:r>
+              <a:rPr lang="en-US" sz="900" dirty="0">
+                <a:solidFill>
+                  <a:srgbClr val="17255A"/>
+                </a:solidFill>
+                <a:latin typeface="Segoe UI" pitchFamily="34" charset="0"/>
+                <a:ea typeface="Segoe UI" pitchFamily="34" charset="-122"/>
+                <a:cs typeface="Segoe UI" pitchFamily="34" charset="-120"/>
+              </a:rPr>
+              <a:t>• Log Analytics Reader — Query logs and dashboards</a:t>
+            </a:r>
+            <a:endParaRPr lang="en-US" sz="900" dirty="0"/>
+          </a:p>
+          <a:p>
+            <a:pPr indent="0" marL="0">
+              <a:buNone/>
+            </a:pPr>
+            <a:r>
+              <a:rPr lang="en-US" sz="900" dirty="0">
+                <a:solidFill>
+                  <a:srgbClr val="17255A"/>
+                </a:solidFill>
+                <a:latin typeface="Segoe UI" pitchFamily="34" charset="0"/>
+                <a:ea typeface="Segoe UI" pitchFamily="34" charset="-122"/>
+                <a:cs typeface="Segoe UI" pitchFamily="34" charset="-120"/>
+              </a:rPr>
+              <a:t>• Container App Contributor — Restart, scale, update revisions</a:t>
+            </a:r>
+            <a:endParaRPr lang="en-US" sz="900" dirty="0"/>
+          </a:p>
+          <a:p>
+            <a:pPr indent="0" marL="0">
+              <a:buNone/>
+            </a:pPr>
+            <a:r>
+              <a:rPr lang="en-US" sz="900" dirty="0">
+                <a:solidFill>
+                  <a:srgbClr val="17255A"/>
+                </a:solidFill>
+                <a:latin typeface="Segoe UI" pitchFamily="34" charset="0"/>
+                <a:ea typeface="Segoe UI" pitchFamily="34" charset="-122"/>
+                <a:cs typeface="Segoe UI" pitchFamily="34" charset="-120"/>
+              </a:rPr>
+              <a:t>• Monitoring Contributor — Create alerts and action groups</a:t>
+            </a:r>
+            <a:endParaRPr lang="en-US" sz="900" dirty="0"/>
           </a:p>
         </p:txBody>
       </p:sp>

--- a/FridayReportAI_Azure_Deployment_Flow.pptx
+++ b/FridayReportAI_Azure_Deployment_Flow.pptx
@@ -22875,11 +22875,11 @@
         <p:spPr>
           <a:xfrm>
             <a:off x="4389120" y="2560320"/>
-            <a:ext cx="3474720" cy="1389888"/>
+            <a:ext cx="3474720" cy="1591056"/>
           </a:xfrm>
           <a:prstGeom prst="rect">
             <a:avLst>
-              <a:gd name="adj" fmla="val 3947"/>
+              <a:gd name="adj" fmla="val 3448"/>
             </a:avLst>
           </a:prstGeom>
           <a:solidFill>
@@ -22922,7 +22922,7 @@
         <p:spPr>
           <a:xfrm>
             <a:off x="4498848" y="2651760"/>
-            <a:ext cx="3255264" cy="1207008"/>
+            <a:ext cx="3255264" cy="1408176"/>
           </a:xfrm>
           <a:prstGeom prst="rect">
             <a:avLst/>
@@ -22964,6 +22964,23 @@
                 <a:cs typeface="Segoe UI" pitchFamily="34" charset="-120"/>
               </a:rPr>
               <a:t>• Public network access: Disabled</a:t>
+            </a:r>
+            <a:endParaRPr lang="en-US" sz="1100" dirty="0"/>
+          </a:p>
+          <a:p>
+            <a:pPr indent="0" marL="0">
+              <a:buNone/>
+            </a:pPr>
+            <a:r>
+              <a:rPr lang="en-US" sz="900" dirty="0">
+                <a:solidFill>
+                  <a:srgbClr val="17255A"/>
+                </a:solidFill>
+                <a:latin typeface="Segoe UI" pitchFamily="34" charset="0"/>
+                <a:ea typeface="Segoe UI" pitchFamily="34" charset="-122"/>
+                <a:cs typeface="Segoe UI" pitchFamily="34" charset="-120"/>
+              </a:rPr>
+              <a:t>• Allow Azure services: Enabled (for Container App)</a:t>
             </a:r>
             <a:endParaRPr lang="en-US" sz="1100" dirty="0"/>
           </a:p>
@@ -23217,11 +23234,11 @@
         <p:spPr>
           <a:xfrm>
             <a:off x="548640" y="4389120"/>
-            <a:ext cx="3474720" cy="1389888"/>
+            <a:ext cx="3474720" cy="1591056"/>
           </a:xfrm>
           <a:prstGeom prst="rect">
             <a:avLst>
-              <a:gd name="adj" fmla="val 3947"/>
+              <a:gd name="adj" fmla="val 3448"/>
             </a:avLst>
           </a:prstGeom>
           <a:solidFill>
@@ -23264,7 +23281,7 @@
         <p:spPr>
           <a:xfrm>
             <a:off x="658368" y="4480560"/>
-            <a:ext cx="3255264" cy="1207008"/>
+            <a:ext cx="3255264" cy="1408176"/>
           </a:xfrm>
           <a:prstGeom prst="rect">
             <a:avLst/>
@@ -23288,7 +23305,7 @@
                 <a:ea typeface="Segoe UI" pitchFamily="34" charset="-122"/>
                 <a:cs typeface="Segoe UI" pitchFamily="34" charset="-120"/>
               </a:rPr>
-              <a:t>Ingress &amp; TLS</a:t>
+              <a:t>Ingress, TLS &amp; NSG Rules</a:t>
             </a:r>
             <a:endParaRPr lang="en-US" sz="1100" dirty="0"/>
           </a:p>
@@ -23339,24 +23356,41 @@
                 <a:ea typeface="Segoe UI" pitchFamily="34" charset="-122"/>
                 <a:cs typeface="Segoe UI" pitchFamily="34" charset="-120"/>
               </a:rPr>
+              <a:t>• NSG: Allow 443 inbound, deny all other inbound</a:t>
+            </a:r>
+            <a:endParaRPr lang="en-US" sz="1100" dirty="0"/>
+          </a:p>
+          <a:p>
+            <a:pPr indent="0" marL="0">
+              <a:buNone/>
+            </a:pPr>
+            <a:r>
+              <a:rPr lang="en-US" sz="900" dirty="0">
+                <a:solidFill>
+                  <a:srgbClr val="17255A"/>
+                </a:solidFill>
+                <a:latin typeface="Segoe UI" pitchFamily="34" charset="0"/>
+                <a:ea typeface="Segoe UI" pitchFamily="34" charset="-122"/>
+                <a:cs typeface="Segoe UI" pitchFamily="34" charset="-120"/>
+              </a:rPr>
+              <a:t>• NSG: Allow outbound to PG (5432), KV (443), Blob (443)</a:t>
+            </a:r>
+            <a:endParaRPr lang="en-US" sz="1100" dirty="0"/>
+          </a:p>
+          <a:p>
+            <a:pPr indent="0" marL="0">
+              <a:buNone/>
+            </a:pPr>
+            <a:r>
+              <a:rPr lang="en-US" sz="900" dirty="0">
+                <a:solidFill>
+                  <a:srgbClr val="17255A"/>
+                </a:solidFill>
+                <a:latin typeface="Segoe UI" pitchFamily="34" charset="0"/>
+                <a:ea typeface="Segoe UI" pitchFamily="34" charset="-122"/>
+                <a:cs typeface="Segoe UI" pitchFamily="34" charset="-120"/>
+              </a:rPr>
               <a:t>• Managed TLS certificate (auto-renewed)</a:t>
-            </a:r>
-            <a:endParaRPr lang="en-US" sz="1100" dirty="0"/>
-          </a:p>
-          <a:p>
-            <a:pPr indent="0" marL="0">
-              <a:buNone/>
-            </a:pPr>
-            <a:r>
-              <a:rPr lang="en-US" sz="900" dirty="0">
-                <a:solidFill>
-                  <a:srgbClr val="17255A"/>
-                </a:solidFill>
-                <a:latin typeface="Segoe UI" pitchFamily="34" charset="0"/>
-                <a:ea typeface="Segoe UI" pitchFamily="34" charset="-122"/>
-                <a:cs typeface="Segoe UI" pitchFamily="34" charset="-120"/>
-              </a:rPr>
-              <a:t>• CORS: Configured via Express middleware</a:t>
             </a:r>
             <a:endParaRPr lang="en-US" sz="1100" dirty="0"/>
           </a:p>
